--- a/examples/sample-master.pptx
+++ b/examples/sample-master.pptx
@@ -134,13 +134,17 @@
         </p:nvSpPr>
         <p:spPr>
           <a:xfrm>
-            <a:off x="1524000" y="1122363"/>
-            <a:ext cx="9144000" cy="2387600"/>
+            <a:off x="731520" y="2619523"/>
+            <a:ext cx="10728960" cy="1600200"/>
           </a:xfrm>
         </p:spPr>
         <p:txBody>
           <a:bodyPr/>
-          <a:lstStyle/>
+          <a:lstStyle>
+            <a:lvl1pPr algn="l">
+              <a:defRPr sz="4000"/>
+            </a:lvl1pPr>
+          </a:lstStyle>
           <a:p>
             <a:r>
               <a:rPr lang="en-US" smtClean="0"/>
@@ -162,16 +166,16 @@
         </p:nvSpPr>
         <p:spPr>
           <a:xfrm>
-            <a:off x="1524000" y="3602038"/>
-            <a:ext cx="9144000" cy="1655762"/>
+            <a:off x="731520" y="4402603"/>
+            <a:ext cx="10728960" cy="900000"/>
           </a:xfrm>
         </p:spPr>
         <p:txBody>
           <a:bodyPr/>
           <a:lstStyle>
-            <a:lvl1pPr marL="0" indent="0" algn="ctr">
+            <a:lvl1pPr marL="0" indent="0" algn="l">
               <a:buNone/>
-              <a:defRPr>
+              <a:defRPr sz="1800">
                 <a:solidFill>
                   <a:schemeClr val="tx1">
                     <a:tint val="75000"/>
@@ -546,15 +550,15 @@
         </p:nvSpPr>
         <p:spPr>
           <a:xfrm>
-            <a:off x="831850" y="1709738"/>
-            <a:ext cx="10515600" cy="2852737"/>
+            <a:off x="731520" y="2057400"/>
+            <a:ext cx="10728960" cy="1200000"/>
           </a:xfrm>
         </p:spPr>
         <p:txBody>
           <a:bodyPr anchor="t"/>
           <a:lstStyle>
             <a:lvl1pPr algn="l">
-              <a:defRPr sz="4000" b="1" cap="all"/>
+              <a:defRPr sz="3600" b="1" cap="all"/>
             </a:lvl1pPr>
           </a:lstStyle>
           <a:p>
@@ -578,16 +582,16 @@
         </p:nvSpPr>
         <p:spPr>
           <a:xfrm>
-            <a:off x="831850" y="4589463"/>
-            <a:ext cx="10515600" cy="1500187"/>
+            <a:off x="731520" y="3440280"/>
+            <a:ext cx="10728960" cy="800000"/>
           </a:xfrm>
         </p:spPr>
         <p:txBody>
           <a:bodyPr anchor="b"/>
           <a:lstStyle>
-            <a:lvl1pPr marL="0" indent="0">
+            <a:lvl1pPr marL="0" indent="0" algn="l">
               <a:buNone/>
-              <a:defRPr sz="2000">
+              <a:defRPr sz="1800">
                 <a:solidFill>
                   <a:schemeClr val="tx1">
                     <a:tint val="75000"/>
@@ -815,8 +819,8 @@
         </p:nvSpPr>
         <p:spPr>
           <a:xfrm>
-            <a:off x="838200" y="1825625"/>
-            <a:ext cx="5181600" cy="4351338"/>
+            <a:off x="731520" y="1981200"/>
+            <a:ext cx="5120640" cy="4131310"/>
           </a:xfrm>
         </p:spPr>
         <p:txBody>
@@ -900,8 +904,8 @@
         </p:nvSpPr>
         <p:spPr>
           <a:xfrm>
-            <a:off x="6172200" y="1825625"/>
-            <a:ext cx="5181600" cy="4351338"/>
+            <a:off x="6339840" y="1981200"/>
+            <a:ext cx="5120640" cy="4131310"/>
           </a:xfrm>
         </p:spPr>
         <p:txBody>
@@ -1350,15 +1354,15 @@
         </p:nvSpPr>
         <p:spPr>
           <a:xfrm>
-            <a:off x="838200" y="365125"/>
-            <a:ext cx="10515600" cy="1325563"/>
+            <a:off x="731520" y="731520"/>
+            <a:ext cx="10728960" cy="1005840"/>
           </a:xfrm>
           <a:prstGeom prst="rect">
             <a:avLst/>
           </a:prstGeom>
         </p:spPr>
         <p:txBody>
-          <a:bodyPr vert="horz" lIns="91440" tIns="45720" rIns="91440" bIns="45720" rtlCol="0" anchor="ctr">
+          <a:bodyPr vert="horz" lIns="91440" tIns="45720" rIns="91440" bIns="45720" rtlCol="0" anchor="b">
             <a:normAutofit/>
           </a:bodyPr>
           <a:lstStyle/>
@@ -1383,8 +1387,8 @@
         </p:nvSpPr>
         <p:spPr>
           <a:xfrm>
-            <a:off x="838200" y="1825625"/>
-            <a:ext cx="10515600" cy="4351338"/>
+            <a:off x="731520" y="1981200"/>
+            <a:ext cx="10728960" cy="4131310"/>
           </a:xfrm>
           <a:prstGeom prst="rect">
             <a:avLst/>
@@ -1445,7 +1449,7 @@
         </p:nvSpPr>
         <p:spPr>
           <a:xfrm>
-            <a:off x="838200" y="6356350"/>
+            <a:off x="731520" y="6356350"/>
             <a:ext cx="2743200" cy="365125"/>
           </a:xfrm>
           <a:prstGeom prst="rect">
@@ -1523,7 +1527,7 @@
         </p:nvSpPr>
         <p:spPr>
           <a:xfrm>
-            <a:off x="8610600" y="6356350"/>
+            <a:off x="8717280" y="6356350"/>
             <a:ext cx="2743200" cy="365125"/>
           </a:xfrm>
           <a:prstGeom prst="rect">
@@ -1575,7 +1579,7 @@
           <a:spcPct val="0"/>
         </a:spcBef>
         <a:buNone/>
-        <a:defRPr sz="4400" kern="1200">
+        <a:defRPr sz="3200" kern="1200">
           <a:solidFill>
             <a:schemeClr val="tx1"/>
           </a:solidFill>
@@ -1586,13 +1590,13 @@
       </a:lvl1pPr>
     </p:titleStyle>
     <p:bodyStyle>
-      <a:lvl1pPr marL="342900" indent="-342900" algn="l" defTabSz="457200" rtl="0" eaLnBrk="1" latinLnBrk="0" hangingPunct="1">
+      <a:lvl1pPr marL="365760" indent="-365760" algn="l" defTabSz="457200" rtl="0" eaLnBrk="1" latinLnBrk="0" hangingPunct="1">
         <a:spcBef>
           <a:spcPct val="20000"/>
         </a:spcBef>
         <a:buFont typeface="Arial"/>
         <a:buChar char="•"/>
-        <a:defRPr sz="3200" kern="1200">
+        <a:defRPr sz="1800" kern="1200">
           <a:solidFill>
             <a:schemeClr val="tx1"/>
           </a:solidFill>
@@ -1601,13 +1605,13 @@
           <a:cs typeface="+mn-cs"/>
         </a:defRPr>
       </a:lvl1pPr>
-      <a:lvl2pPr marL="742950" indent="-285750" algn="l" defTabSz="457200" rtl="0" eaLnBrk="1" latinLnBrk="0" hangingPunct="1">
+      <a:lvl2pPr marL="650240" indent="-325120" algn="l" defTabSz="457200" rtl="0" eaLnBrk="1" latinLnBrk="0" hangingPunct="1">
         <a:spcBef>
           <a:spcPct val="20000"/>
         </a:spcBef>
         <a:buFont typeface="Arial"/>
         <a:buChar char="–"/>
-        <a:defRPr sz="2800" kern="1200">
+        <a:defRPr sz="1600" kern="1200">
           <a:solidFill>
             <a:schemeClr val="tx1"/>
           </a:solidFill>
@@ -1616,13 +1620,13 @@
           <a:cs typeface="+mn-cs"/>
         </a:defRPr>
       </a:lvl2pPr>
-      <a:lvl3pPr marL="1143000" indent="-228600" algn="l" defTabSz="457200" rtl="0" eaLnBrk="1" latinLnBrk="0" hangingPunct="1">
+      <a:lvl3pPr marL="853440" indent="-284480" algn="l" defTabSz="457200" rtl="0" eaLnBrk="1" latinLnBrk="0" hangingPunct="1">
         <a:spcBef>
           <a:spcPct val="20000"/>
         </a:spcBef>
         <a:buFont typeface="Arial"/>
         <a:buChar char="•"/>
-        <a:defRPr sz="2400" kern="1200">
+        <a:defRPr sz="1400" kern="1200">
           <a:solidFill>
             <a:schemeClr val="tx1"/>
           </a:solidFill>
@@ -1631,13 +1635,13 @@
           <a:cs typeface="+mn-cs"/>
         </a:defRPr>
       </a:lvl3pPr>
-      <a:lvl4pPr marL="1600200" indent="-228600" algn="l" defTabSz="457200" rtl="0" eaLnBrk="1" latinLnBrk="0" hangingPunct="1">
+      <a:lvl4pPr marL="975360" indent="-243840" algn="l" defTabSz="457200" rtl="0" eaLnBrk="1" latinLnBrk="0" hangingPunct="1">
         <a:spcBef>
           <a:spcPct val="20000"/>
         </a:spcBef>
         <a:buFont typeface="Arial"/>
         <a:buChar char="–"/>
-        <a:defRPr sz="2000" kern="1200">
+        <a:defRPr sz="1200" kern="1200">
           <a:solidFill>
             <a:schemeClr val="tx1"/>
           </a:solidFill>
@@ -1646,13 +1650,13 @@
           <a:cs typeface="+mn-cs"/>
         </a:defRPr>
       </a:lvl4pPr>
-      <a:lvl5pPr marL="2057400" indent="-228600" algn="l" defTabSz="457200" rtl="0" eaLnBrk="1" latinLnBrk="0" hangingPunct="1">
+      <a:lvl5pPr marL="1219200" indent="-243840" algn="l" defTabSz="457200" rtl="0" eaLnBrk="1" latinLnBrk="0" hangingPunct="1">
         <a:spcBef>
           <a:spcPct val="20000"/>
         </a:spcBef>
         <a:buFont typeface="Arial"/>
         <a:buChar char="»"/>
-        <a:defRPr sz="2000" kern="1200">
+        <a:defRPr sz="1200" kern="1200">
           <a:solidFill>
             <a:schemeClr val="tx1"/>
           </a:solidFill>
@@ -1864,10 +1868,10 @@
     </a:clrScheme>
     <a:fontScheme name="Office">
       <a:majorFont>
-        <a:latin typeface="Calibri"/>
+        <a:latin typeface="Helvetica Neue"/>
         <a:ea typeface=""/>
         <a:cs typeface=""/>
-        <a:font script="Jpan" typeface="ＭＳ Ｐゴシック"/>
+        <a:font script="Jpan" typeface="Hiragino Sans"/>
         <a:font script="Hang" typeface="맑은 고딕"/>
         <a:font script="Hans" typeface="宋体"/>
         <a:font script="Hant" typeface="新細明體"/>
@@ -1899,10 +1903,10 @@
         <a:font script="Geor" typeface="Sylfaen"/>
       </a:majorFont>
       <a:minorFont>
-        <a:latin typeface="Calibri"/>
+        <a:latin typeface="Helvetica Neue"/>
         <a:ea typeface=""/>
         <a:cs typeface=""/>
-        <a:font script="Jpan" typeface="ＭＳ Ｐゴシック"/>
+        <a:font script="Jpan" typeface="Hiragino Sans"/>
         <a:font script="Hang" typeface="맑은 고딕"/>
         <a:font script="Hans" typeface="宋体"/>
         <a:font script="Hant" typeface="新細明體"/>
